--- a/docs/tattoolink.pptx
+++ b/docs/tattoolink.pptx
@@ -108,6 +108,11 @@
       </a:defRPr>
     </a:lvl9pPr>
   </p:defaultTextStyle>
+  <p:extLst>
+    <p:ext uri="{EFAFB233-063F-42B5-8137-9DF3F51BA10A}">
+      <p15:sldGuideLst xmlns:p15="http://schemas.microsoft.com/office/powerpoint/2012/main"/>
+    </p:ext>
+  </p:extLst>
 </p:presentation>
 </file>
 
@@ -3457,6 +3462,41 @@
           </a:prstGeom>
         </p:spPr>
       </p:pic>
+      <p:sp>
+        <p:nvSpPr>
+          <p:cNvPr id="2" name="Szövegdoboz 1">
+            <a:extLst>
+              <a:ext uri="{FF2B5EF4-FFF2-40B4-BE49-F238E27FC236}">
+                <a16:creationId xmlns:a16="http://schemas.microsoft.com/office/drawing/2014/main" id="{DAFB3C42-86DE-8E96-267E-8C0321C21669}"/>
+              </a:ext>
+            </a:extLst>
+          </p:cNvPr>
+          <p:cNvSpPr txBox="1"/>
+          <p:nvPr/>
+        </p:nvSpPr>
+        <p:spPr>
+          <a:xfrm>
+            <a:off x="1296802" y="4001014"/>
+            <a:ext cx="4380617" cy="369332"/>
+          </a:xfrm>
+          <a:prstGeom prst="rect">
+            <a:avLst/>
+          </a:prstGeom>
+          <a:noFill/>
+        </p:spPr>
+        <p:txBody>
+          <a:bodyPr wrap="square" rtlCol="0">
+            <a:spAutoFit/>
+          </a:bodyPr>
+          <a:lstStyle/>
+          <a:p>
+            <a:r>
+              <a:rPr lang="hu-HU" dirty="0"/>
+              <a:t>Tetoválószalon időpontfoglaló alkalmazás</a:t>
+            </a:r>
+          </a:p>
+        </p:txBody>
+      </p:sp>
     </p:spTree>
     <p:extLst>
       <p:ext uri="{BB962C8B-B14F-4D97-AF65-F5344CB8AC3E}">

--- a/docs/tattoolink.pptx
+++ b/docs/tattoolink.pptx
@@ -10,6 +10,7 @@
     <p:sldId id="258" r:id="rId4"/>
     <p:sldId id="259" r:id="rId5"/>
     <p:sldId id="260" r:id="rId6"/>
+    <p:sldId id="261" r:id="rId7"/>
   </p:sldIdLst>
   <p:sldSz cx="12192000" cy="6858000"/>
   <p:notesSz cx="6858000" cy="9144000"/>
@@ -263,7 +264,7 @@
           <a:p>
             <a:fld id="{1B667B99-0FBC-45F4-B63F-CBE452290BE7}" type="datetimeFigureOut">
               <a:rPr lang="hu-HU" smtClean="0"/>
-              <a:t>2026. 03. 13.</a:t>
+              <a:t>2026. 03. 16.</a:t>
             </a:fld>
             <a:endParaRPr lang="hu-HU"/>
           </a:p>
@@ -461,7 +462,7 @@
           <a:p>
             <a:fld id="{1B667B99-0FBC-45F4-B63F-CBE452290BE7}" type="datetimeFigureOut">
               <a:rPr lang="hu-HU" smtClean="0"/>
-              <a:t>2026. 03. 13.</a:t>
+              <a:t>2026. 03. 16.</a:t>
             </a:fld>
             <a:endParaRPr lang="hu-HU"/>
           </a:p>
@@ -669,7 +670,7 @@
           <a:p>
             <a:fld id="{1B667B99-0FBC-45F4-B63F-CBE452290BE7}" type="datetimeFigureOut">
               <a:rPr lang="hu-HU" smtClean="0"/>
-              <a:t>2026. 03. 13.</a:t>
+              <a:t>2026. 03. 16.</a:t>
             </a:fld>
             <a:endParaRPr lang="hu-HU"/>
           </a:p>
@@ -867,7 +868,7 @@
           <a:p>
             <a:fld id="{1B667B99-0FBC-45F4-B63F-CBE452290BE7}" type="datetimeFigureOut">
               <a:rPr lang="hu-HU" smtClean="0"/>
-              <a:t>2026. 03. 13.</a:t>
+              <a:t>2026. 03. 16.</a:t>
             </a:fld>
             <a:endParaRPr lang="hu-HU"/>
           </a:p>
@@ -1142,7 +1143,7 @@
           <a:p>
             <a:fld id="{1B667B99-0FBC-45F4-B63F-CBE452290BE7}" type="datetimeFigureOut">
               <a:rPr lang="hu-HU" smtClean="0"/>
-              <a:t>2026. 03. 13.</a:t>
+              <a:t>2026. 03. 16.</a:t>
             </a:fld>
             <a:endParaRPr lang="hu-HU"/>
           </a:p>
@@ -1407,7 +1408,7 @@
           <a:p>
             <a:fld id="{1B667B99-0FBC-45F4-B63F-CBE452290BE7}" type="datetimeFigureOut">
               <a:rPr lang="hu-HU" smtClean="0"/>
-              <a:t>2026. 03. 13.</a:t>
+              <a:t>2026. 03. 16.</a:t>
             </a:fld>
             <a:endParaRPr lang="hu-HU"/>
           </a:p>
@@ -1819,7 +1820,7 @@
           <a:p>
             <a:fld id="{1B667B99-0FBC-45F4-B63F-CBE452290BE7}" type="datetimeFigureOut">
               <a:rPr lang="hu-HU" smtClean="0"/>
-              <a:t>2026. 03. 13.</a:t>
+              <a:t>2026. 03. 16.</a:t>
             </a:fld>
             <a:endParaRPr lang="hu-HU"/>
           </a:p>
@@ -1960,7 +1961,7 @@
           <a:p>
             <a:fld id="{1B667B99-0FBC-45F4-B63F-CBE452290BE7}" type="datetimeFigureOut">
               <a:rPr lang="hu-HU" smtClean="0"/>
-              <a:t>2026. 03. 13.</a:t>
+              <a:t>2026. 03. 16.</a:t>
             </a:fld>
             <a:endParaRPr lang="hu-HU"/>
           </a:p>
@@ -2073,7 +2074,7 @@
           <a:p>
             <a:fld id="{1B667B99-0FBC-45F4-B63F-CBE452290BE7}" type="datetimeFigureOut">
               <a:rPr lang="hu-HU" smtClean="0"/>
-              <a:t>2026. 03. 13.</a:t>
+              <a:t>2026. 03. 16.</a:t>
             </a:fld>
             <a:endParaRPr lang="hu-HU"/>
           </a:p>
@@ -2384,7 +2385,7 @@
           <a:p>
             <a:fld id="{1B667B99-0FBC-45F4-B63F-CBE452290BE7}" type="datetimeFigureOut">
               <a:rPr lang="hu-HU" smtClean="0"/>
-              <a:t>2026. 03. 13.</a:t>
+              <a:t>2026. 03. 16.</a:t>
             </a:fld>
             <a:endParaRPr lang="hu-HU"/>
           </a:p>
@@ -2672,7 +2673,7 @@
           <a:p>
             <a:fld id="{1B667B99-0FBC-45F4-B63F-CBE452290BE7}" type="datetimeFigureOut">
               <a:rPr lang="hu-HU" smtClean="0"/>
-              <a:t>2026. 03. 13.</a:t>
+              <a:t>2026. 03. 16.</a:t>
             </a:fld>
             <a:endParaRPr lang="hu-HU"/>
           </a:p>
@@ -2913,7 +2914,7 @@
           <a:p>
             <a:fld id="{1B667B99-0FBC-45F4-B63F-CBE452290BE7}" type="datetimeFigureOut">
               <a:rPr lang="hu-HU" smtClean="0"/>
-              <a:t>2026. 03. 13.</a:t>
+              <a:t>2026. 03. 16.</a:t>
             </a:fld>
             <a:endParaRPr lang="hu-HU"/>
           </a:p>
@@ -3613,7 +3614,7 @@
         </p:nvSpPr>
         <p:spPr>
           <a:xfrm>
-            <a:off x="838200" y="365125"/>
+            <a:off x="258097" y="433951"/>
             <a:ext cx="10515600" cy="1860400"/>
           </a:xfrm>
         </p:spPr>
@@ -3831,7 +3832,7 @@
         </p:nvSpPr>
         <p:spPr>
           <a:xfrm>
-            <a:off x="838200" y="365125"/>
+            <a:off x="267929" y="384789"/>
             <a:ext cx="10515600" cy="1860400"/>
           </a:xfrm>
         </p:spPr>
@@ -3941,6 +3942,14 @@
 <file path=ppt/slides/slide4.xml><?xml version="1.0" encoding="utf-8"?>
 <p:sld xmlns:a="http://schemas.openxmlformats.org/drawingml/2006/main" xmlns:r="http://schemas.openxmlformats.org/officeDocument/2006/relationships" xmlns:p="http://schemas.openxmlformats.org/presentationml/2006/main">
   <p:cSld>
+    <p:bg>
+      <p:bgPr>
+        <a:solidFill>
+          <a:schemeClr val="bg1"/>
+        </a:solidFill>
+        <a:effectLst/>
+      </p:bgPr>
+    </p:bg>
     <p:spTree>
       <p:nvGrpSpPr>
         <p:cNvPr id="1" name=""/>
@@ -3955,6 +3964,66 @@
           <a:chExt cx="0" cy="0"/>
         </a:xfrm>
       </p:grpSpPr>
+      <p:sp useBgFill="1">
+        <p:nvSpPr>
+          <p:cNvPr id="12" name="Rectangle 11">
+            <a:extLst>
+              <a:ext uri="{FF2B5EF4-FFF2-40B4-BE49-F238E27FC236}">
+                <a16:creationId xmlns:a16="http://schemas.microsoft.com/office/drawing/2014/main" id="{99ED5833-B85B-4103-8A3B-CAB0308E6C15}"/>
+              </a:ext>
+              <a:ext uri="{C183D7F6-B498-43B3-948B-1728B52AA6E4}">
+                <adec:decorative xmlns:adec="http://schemas.microsoft.com/office/drawing/2017/decorative" val="1"/>
+              </a:ext>
+            </a:extLst>
+          </p:cNvPr>
+          <p:cNvSpPr>
+            <a:spLocks noGrp="1" noRot="1" noChangeAspect="1" noMove="1" noResize="1" noEditPoints="1" noAdjustHandles="1" noChangeArrowheads="1" noChangeShapeType="1" noTextEdit="1"/>
+          </p:cNvSpPr>
+          <p:nvPr>
+            <p:extLst>
+              <p:ext uri="{386F3935-93C4-4BCD-93E2-E3B085C9AB24}">
+                <p16:designElem xmlns:p16="http://schemas.microsoft.com/office/powerpoint/2015/main" val="1"/>
+              </p:ext>
+            </p:extLst>
+          </p:nvPr>
+        </p:nvSpPr>
+        <p:spPr>
+          <a:xfrm>
+            <a:off x="-1" y="0"/>
+            <a:ext cx="12188952" cy="6858000"/>
+          </a:xfrm>
+          <a:prstGeom prst="rect">
+            <a:avLst/>
+          </a:prstGeom>
+          <a:ln>
+            <a:noFill/>
+          </a:ln>
+        </p:spPr>
+        <p:style>
+          <a:lnRef idx="2">
+            <a:schemeClr val="accent1">
+              <a:shade val="50000"/>
+            </a:schemeClr>
+          </a:lnRef>
+          <a:fillRef idx="1">
+            <a:schemeClr val="accent1"/>
+          </a:fillRef>
+          <a:effectRef idx="0">
+            <a:schemeClr val="accent1"/>
+          </a:effectRef>
+          <a:fontRef idx="minor">
+            <a:schemeClr val="lt1"/>
+          </a:fontRef>
+        </p:style>
+        <p:txBody>
+          <a:bodyPr rtlCol="0" anchor="ctr"/>
+          <a:lstStyle/>
+          <a:p>
+            <a:pPr algn="ctr"/>
+            <a:endParaRPr lang="en-US"/>
+          </a:p>
+        </p:txBody>
+      </p:sp>
       <p:sp>
         <p:nvSpPr>
           <p:cNvPr id="2" name="Cím 1">
@@ -3971,28 +4040,48 @@
             <p:ph type="title"/>
           </p:nvPr>
         </p:nvSpPr>
-        <p:spPr/>
-        <p:txBody>
-          <a:bodyPr/>
-          <a:lstStyle/>
-          <a:p>
+        <p:spPr>
+          <a:xfrm>
+            <a:off x="586602" y="374957"/>
+            <a:ext cx="10515600" cy="1860400"/>
+          </a:xfrm>
+        </p:spPr>
+        <p:txBody>
+          <a:bodyPr vert="horz" lIns="91440" tIns="45720" rIns="91440" bIns="45720" rtlCol="0" anchor="ctr">
+            <a:normAutofit/>
+          </a:bodyPr>
+          <a:lstStyle/>
+          <a:p>
+            <a:r>
+              <a:rPr lang="en-US" sz="5200" b="1" dirty="0" err="1">
+                <a:solidFill>
+                  <a:srgbClr val="4B2B58"/>
+                </a:solidFill>
+              </a:rPr>
+              <a:t>Specifikáci</a:t>
+            </a:r>
             <a:r>
               <a:rPr lang="hu-HU" sz="5200" b="1" dirty="0">
                 <a:solidFill>
                   <a:srgbClr val="4B2B58"/>
                 </a:solidFill>
               </a:rPr>
-              <a:t>Specifikáció vázlat</a:t>
-            </a:r>
+              <a:t>ó</a:t>
+            </a:r>
+            <a:endParaRPr lang="en-US" sz="5200" b="1" dirty="0">
+              <a:solidFill>
+                <a:srgbClr val="4B2B58"/>
+              </a:solidFill>
+            </a:endParaRPr>
           </a:p>
         </p:txBody>
       </p:sp>
       <p:pic>
         <p:nvPicPr>
-          <p:cNvPr id="5" name="Kép 4">
-            <a:extLst>
-              <a:ext uri="{FF2B5EF4-FFF2-40B4-BE49-F238E27FC236}">
-                <a16:creationId xmlns:a16="http://schemas.microsoft.com/office/drawing/2014/main" id="{757EAAEB-4384-336C-C908-E4F4941E3993}"/>
+          <p:cNvPr id="7" name="Kép 6">
+            <a:extLst>
+              <a:ext uri="{FF2B5EF4-FFF2-40B4-BE49-F238E27FC236}">
+                <a16:creationId xmlns:a16="http://schemas.microsoft.com/office/drawing/2014/main" id="{DD9FABD0-EAAB-2F96-F9B7-30B1D8F6FAB4}"/>
               </a:ext>
             </a:extLst>
           </p:cNvPr>
@@ -4009,8 +4098,38 @@
         </p:blipFill>
         <p:spPr>
           <a:xfrm>
-            <a:off x="2781300" y="1595714"/>
-            <a:ext cx="6629400" cy="4897161"/>
+            <a:off x="586602" y="2365285"/>
+            <a:ext cx="5017524" cy="3938756"/>
+          </a:xfrm>
+          <a:prstGeom prst="rect">
+            <a:avLst/>
+          </a:prstGeom>
+        </p:spPr>
+      </p:pic>
+      <p:pic>
+        <p:nvPicPr>
+          <p:cNvPr id="4" name="Kép 3">
+            <a:extLst>
+              <a:ext uri="{FF2B5EF4-FFF2-40B4-BE49-F238E27FC236}">
+                <a16:creationId xmlns:a16="http://schemas.microsoft.com/office/drawing/2014/main" id="{47B06D62-053F-BBC6-A7B2-A44618977A10}"/>
+              </a:ext>
+            </a:extLst>
+          </p:cNvPr>
+          <p:cNvPicPr>
+            <a:picLocks noChangeAspect="1"/>
+          </p:cNvPicPr>
+          <p:nvPr/>
+        </p:nvPicPr>
+        <p:blipFill>
+          <a:blip r:embed="rId3"/>
+          <a:stretch>
+            <a:fillRect/>
+          </a:stretch>
+        </p:blipFill>
+        <p:spPr>
+          <a:xfrm>
+            <a:off x="6539001" y="2365285"/>
+            <a:ext cx="5115268" cy="3938756"/>
           </a:xfrm>
           <a:prstGeom prst="rect">
             <a:avLst/>
@@ -4033,6 +4152,14 @@
 <file path=ppt/slides/slide5.xml><?xml version="1.0" encoding="utf-8"?>
 <p:sld xmlns:a="http://schemas.openxmlformats.org/drawingml/2006/main" xmlns:r="http://schemas.openxmlformats.org/officeDocument/2006/relationships" xmlns:p="http://schemas.openxmlformats.org/presentationml/2006/main">
   <p:cSld>
+    <p:bg>
+      <p:bgPr>
+        <a:solidFill>
+          <a:schemeClr val="bg1"/>
+        </a:solidFill>
+        <a:effectLst/>
+      </p:bgPr>
+    </p:bg>
     <p:spTree>
       <p:nvGrpSpPr>
         <p:cNvPr id="1" name=""/>
@@ -4047,12 +4174,148 @@
           <a:chExt cx="0" cy="0"/>
         </a:xfrm>
       </p:grpSpPr>
+      <p:sp useBgFill="1">
+        <p:nvSpPr>
+          <p:cNvPr id="12" name="Rectangle 11">
+            <a:extLst>
+              <a:ext uri="{FF2B5EF4-FFF2-40B4-BE49-F238E27FC236}">
+                <a16:creationId xmlns:a16="http://schemas.microsoft.com/office/drawing/2014/main" id="{99ED5833-B85B-4103-8A3B-CAB0308E6C15}"/>
+              </a:ext>
+              <a:ext uri="{C183D7F6-B498-43B3-948B-1728B52AA6E4}">
+                <adec:decorative xmlns:adec="http://schemas.microsoft.com/office/drawing/2017/decorative" val="1"/>
+              </a:ext>
+            </a:extLst>
+          </p:cNvPr>
+          <p:cNvSpPr>
+            <a:spLocks noGrp="1" noRot="1" noChangeAspect="1" noMove="1" noResize="1" noEditPoints="1" noAdjustHandles="1" noChangeArrowheads="1" noChangeShapeType="1" noTextEdit="1"/>
+          </p:cNvSpPr>
+          <p:nvPr>
+            <p:extLst>
+              <p:ext uri="{386F3935-93C4-4BCD-93E2-E3B085C9AB24}">
+                <p16:designElem xmlns:p16="http://schemas.microsoft.com/office/powerpoint/2015/main" val="1"/>
+              </p:ext>
+            </p:extLst>
+          </p:nvPr>
+        </p:nvSpPr>
+        <p:spPr>
+          <a:xfrm>
+            <a:off x="-1" y="0"/>
+            <a:ext cx="12188952" cy="6858000"/>
+          </a:xfrm>
+          <a:prstGeom prst="rect">
+            <a:avLst/>
+          </a:prstGeom>
+          <a:ln>
+            <a:noFill/>
+          </a:ln>
+        </p:spPr>
+        <p:style>
+          <a:lnRef idx="2">
+            <a:schemeClr val="accent1">
+              <a:shade val="50000"/>
+            </a:schemeClr>
+          </a:lnRef>
+          <a:fillRef idx="1">
+            <a:schemeClr val="accent1"/>
+          </a:fillRef>
+          <a:effectRef idx="0">
+            <a:schemeClr val="accent1"/>
+          </a:effectRef>
+          <a:fontRef idx="minor">
+            <a:schemeClr val="lt1"/>
+          </a:fontRef>
+        </p:style>
+        <p:txBody>
+          <a:bodyPr rtlCol="0" anchor="ctr"/>
+          <a:lstStyle/>
+          <a:p>
+            <a:pPr algn="ctr"/>
+            <a:endParaRPr lang="en-US"/>
+          </a:p>
+        </p:txBody>
+      </p:sp>
+      <p:sp>
+        <p:nvSpPr>
+          <p:cNvPr id="6" name="Cím 1">
+            <a:extLst>
+              <a:ext uri="{FF2B5EF4-FFF2-40B4-BE49-F238E27FC236}">
+                <a16:creationId xmlns:a16="http://schemas.microsoft.com/office/drawing/2014/main" id="{B3828144-4A89-EF84-2058-980E7824D8D6}"/>
+              </a:ext>
+            </a:extLst>
+          </p:cNvPr>
+          <p:cNvSpPr>
+            <a:spLocks noGrp="1"/>
+          </p:cNvSpPr>
+          <p:nvPr>
+            <p:ph type="title"/>
+          </p:nvPr>
+        </p:nvSpPr>
+        <p:spPr>
+          <a:xfrm>
+            <a:off x="612058" y="404454"/>
+            <a:ext cx="10515600" cy="1860400"/>
+          </a:xfrm>
+        </p:spPr>
+        <p:txBody>
+          <a:bodyPr vert="horz" lIns="91440" tIns="45720" rIns="91440" bIns="45720" rtlCol="0" anchor="ctr">
+            <a:normAutofit/>
+          </a:bodyPr>
+          <a:lstStyle/>
+          <a:p>
+            <a:r>
+              <a:rPr lang="en-US" sz="5200" b="1" dirty="0" err="1">
+                <a:solidFill>
+                  <a:srgbClr val="4B2B58"/>
+                </a:solidFill>
+              </a:rPr>
+              <a:t>Komponensek</a:t>
+            </a:r>
+            <a:r>
+              <a:rPr lang="en-US" sz="5200" b="1" dirty="0">
+                <a:solidFill>
+                  <a:srgbClr val="4B2B58"/>
+                </a:solidFill>
+              </a:rPr>
+              <a:t> </a:t>
+            </a:r>
+            <a:r>
+              <a:rPr lang="en-US" sz="5200" b="1" dirty="0" err="1">
+                <a:solidFill>
+                  <a:srgbClr val="4B2B58"/>
+                </a:solidFill>
+              </a:rPr>
+              <a:t>és</a:t>
+            </a:r>
+            <a:r>
+              <a:rPr lang="en-US" sz="5200" b="1" dirty="0">
+                <a:solidFill>
+                  <a:srgbClr val="4B2B58"/>
+                </a:solidFill>
+              </a:rPr>
+              <a:t> </a:t>
+            </a:r>
+            <a:r>
+              <a:rPr lang="en-US" sz="5200" b="1" dirty="0" err="1">
+                <a:solidFill>
+                  <a:srgbClr val="4B2B58"/>
+                </a:solidFill>
+              </a:rPr>
+              <a:t>Adatmodell</a:t>
+            </a:r>
+            <a:endParaRPr lang="en-US" sz="5200" b="1" dirty="0">
+              <a:solidFill>
+                <a:srgbClr val="4B2B58"/>
+              </a:solidFill>
+            </a:endParaRPr>
+          </a:p>
+        </p:txBody>
+      </p:sp>
       <p:pic>
         <p:nvPicPr>
-          <p:cNvPr id="5" name="Kép 4">
-            <a:extLst>
-              <a:ext uri="{FF2B5EF4-FFF2-40B4-BE49-F238E27FC236}">
-                <a16:creationId xmlns:a16="http://schemas.microsoft.com/office/drawing/2014/main" id="{5A07CDB0-C671-B756-4C37-1B96854EB5B4}"/>
+          <p:cNvPr id="3" name="Kép 2">
+            <a:extLst>
+              <a:ext uri="{FF2B5EF4-FFF2-40B4-BE49-F238E27FC236}">
+                <a16:creationId xmlns:a16="http://schemas.microsoft.com/office/drawing/2014/main" id="{1530E22F-B8F2-E4B0-DA9A-1D85E2F4EEDE}"/>
               </a:ext>
             </a:extLst>
           </p:cNvPr>
@@ -4069,55 +4332,347 @@
         </p:blipFill>
         <p:spPr>
           <a:xfrm>
-            <a:off x="2719561" y="1690688"/>
-            <a:ext cx="6752878" cy="4936812"/>
+            <a:off x="743868" y="2365285"/>
+            <a:ext cx="4702993" cy="3938756"/>
           </a:xfrm>
           <a:prstGeom prst="rect">
             <a:avLst/>
           </a:prstGeom>
         </p:spPr>
       </p:pic>
-      <p:sp>
-        <p:nvSpPr>
-          <p:cNvPr id="6" name="Cím 1">
-            <a:extLst>
-              <a:ext uri="{FF2B5EF4-FFF2-40B4-BE49-F238E27FC236}">
-                <a16:creationId xmlns:a16="http://schemas.microsoft.com/office/drawing/2014/main" id="{B3828144-4A89-EF84-2058-980E7824D8D6}"/>
-              </a:ext>
-            </a:extLst>
-          </p:cNvPr>
-          <p:cNvSpPr>
-            <a:spLocks noGrp="1"/>
-          </p:cNvSpPr>
-          <p:nvPr>
-            <p:ph type="title"/>
-          </p:nvPr>
-        </p:nvSpPr>
+      <p:pic>
+        <p:nvPicPr>
+          <p:cNvPr id="7" name="Kép 6">
+            <a:extLst>
+              <a:ext uri="{FF2B5EF4-FFF2-40B4-BE49-F238E27FC236}">
+                <a16:creationId xmlns:a16="http://schemas.microsoft.com/office/drawing/2014/main" id="{DC914F5E-DC8D-268F-F929-5B4A7D369E45}"/>
+              </a:ext>
+            </a:extLst>
+          </p:cNvPr>
+          <p:cNvPicPr>
+            <a:picLocks noChangeAspect="1"/>
+          </p:cNvPicPr>
+          <p:nvPr/>
+        </p:nvPicPr>
+        <p:blipFill>
+          <a:blip r:embed="rId3"/>
+          <a:stretch>
+            <a:fillRect/>
+          </a:stretch>
+        </p:blipFill>
         <p:spPr>
           <a:xfrm>
-            <a:off x="838200" y="365125"/>
-            <a:ext cx="10515600" cy="1325563"/>
+            <a:off x="6702255" y="2365285"/>
+            <a:ext cx="4788761" cy="3938756"/>
           </a:xfrm>
+          <a:prstGeom prst="rect">
+            <a:avLst/>
+          </a:prstGeom>
         </p:spPr>
-        <p:txBody>
-          <a:bodyPr/>
-          <a:lstStyle/>
-          <a:p>
-            <a:r>
-              <a:rPr lang="hu-HU" sz="5200" b="1" dirty="0">
-                <a:solidFill>
-                  <a:srgbClr val="4B2B58"/>
-                </a:solidFill>
-              </a:rPr>
-              <a:t>Specifikáció vázlat</a:t>
-            </a:r>
-          </a:p>
-        </p:txBody>
-      </p:sp>
+      </p:pic>
     </p:spTree>
     <p:extLst>
       <p:ext uri="{BB962C8B-B14F-4D97-AF65-F5344CB8AC3E}">
         <p14:creationId xmlns:p14="http://schemas.microsoft.com/office/powerpoint/2010/main" val="1317876839"/>
+      </p:ext>
+    </p:extLst>
+  </p:cSld>
+  <p:clrMapOvr>
+    <a:masterClrMapping/>
+  </p:clrMapOvr>
+</p:sld>
+</file>
+
+<file path=ppt/slides/slide6.xml><?xml version="1.0" encoding="utf-8"?>
+<p:sld xmlns:a="http://schemas.openxmlformats.org/drawingml/2006/main" xmlns:r="http://schemas.openxmlformats.org/officeDocument/2006/relationships" xmlns:p="http://schemas.openxmlformats.org/presentationml/2006/main">
+  <p:cSld>
+    <p:bg>
+      <p:bgPr>
+        <a:solidFill>
+          <a:schemeClr val="bg1"/>
+        </a:solidFill>
+        <a:effectLst/>
+      </p:bgPr>
+    </p:bg>
+    <p:spTree>
+      <p:nvGrpSpPr>
+        <p:cNvPr id="1" name=""/>
+        <p:cNvGrpSpPr/>
+        <p:nvPr/>
+      </p:nvGrpSpPr>
+      <p:grpSpPr>
+        <a:xfrm>
+          <a:off x="0" y="0"/>
+          <a:ext cx="0" cy="0"/>
+          <a:chOff x="0" y="0"/>
+          <a:chExt cx="0" cy="0"/>
+        </a:xfrm>
+      </p:grpSpPr>
+      <p:sp>
+        <p:nvSpPr>
+          <p:cNvPr id="61" name="Rectangle 60">
+            <a:extLst>
+              <a:ext uri="{FF2B5EF4-FFF2-40B4-BE49-F238E27FC236}">
+                <a16:creationId xmlns:a16="http://schemas.microsoft.com/office/drawing/2014/main" id="{5F9CFCE6-877F-4858-B8BD-2C52CA8AFBC4}"/>
+              </a:ext>
+              <a:ext uri="{C183D7F6-B498-43B3-948B-1728B52AA6E4}">
+                <adec:decorative xmlns:adec="http://schemas.microsoft.com/office/drawing/2017/decorative" val="1"/>
+              </a:ext>
+            </a:extLst>
+          </p:cNvPr>
+          <p:cNvSpPr>
+            <a:spLocks noGrp="1" noRot="1" noChangeAspect="1" noMove="1" noResize="1" noEditPoints="1" noAdjustHandles="1" noChangeArrowheads="1" noChangeShapeType="1" noTextEdit="1"/>
+          </p:cNvSpPr>
+          <p:nvPr>
+            <p:extLst>
+              <p:ext uri="{386F3935-93C4-4BCD-93E2-E3B085C9AB24}">
+                <p16:designElem xmlns:p16="http://schemas.microsoft.com/office/powerpoint/2015/main" val="1"/>
+              </p:ext>
+            </p:extLst>
+          </p:nvPr>
+        </p:nvSpPr>
+        <p:spPr>
+          <a:xfrm>
+            <a:off x="0" y="0"/>
+            <a:ext cx="12192000" cy="6858000"/>
+          </a:xfrm>
+          <a:prstGeom prst="rect">
+            <a:avLst/>
+          </a:prstGeom>
+          <a:solidFill>
+            <a:srgbClr val="41374F"/>
+          </a:solidFill>
+          <a:ln>
+            <a:noFill/>
+          </a:ln>
+        </p:spPr>
+        <p:style>
+          <a:lnRef idx="2">
+            <a:schemeClr val="accent1">
+              <a:shade val="50000"/>
+            </a:schemeClr>
+          </a:lnRef>
+          <a:fillRef idx="1">
+            <a:schemeClr val="accent1"/>
+          </a:fillRef>
+          <a:effectRef idx="0">
+            <a:schemeClr val="accent1"/>
+          </a:effectRef>
+          <a:fontRef idx="minor">
+            <a:schemeClr val="lt1"/>
+          </a:fontRef>
+        </p:style>
+        <p:txBody>
+          <a:bodyPr rtlCol="0" anchor="ctr"/>
+          <a:lstStyle/>
+          <a:p>
+            <a:pPr algn="ctr"/>
+            <a:endParaRPr lang="en-US"/>
+          </a:p>
+        </p:txBody>
+      </p:sp>
+      <p:sp>
+        <p:nvSpPr>
+          <p:cNvPr id="63" name="Rectangle 62">
+            <a:extLst>
+              <a:ext uri="{FF2B5EF4-FFF2-40B4-BE49-F238E27FC236}">
+                <a16:creationId xmlns:a16="http://schemas.microsoft.com/office/drawing/2014/main" id="{8213F8A0-12AE-4514-8372-0DD766EC28EE}"/>
+              </a:ext>
+              <a:ext uri="{C183D7F6-B498-43B3-948B-1728B52AA6E4}">
+                <adec:decorative xmlns:adec="http://schemas.microsoft.com/office/drawing/2017/decorative" val="1"/>
+              </a:ext>
+            </a:extLst>
+          </p:cNvPr>
+          <p:cNvSpPr>
+            <a:spLocks noGrp="1" noRot="1" noChangeAspect="1" noMove="1" noResize="1" noEditPoints="1" noAdjustHandles="1" noChangeArrowheads="1" noChangeShapeType="1" noTextEdit="1"/>
+          </p:cNvSpPr>
+          <p:nvPr>
+            <p:extLst>
+              <p:ext uri="{386F3935-93C4-4BCD-93E2-E3B085C9AB24}">
+                <p16:designElem xmlns:p16="http://schemas.microsoft.com/office/powerpoint/2015/main" val="1"/>
+              </p:ext>
+            </p:extLst>
+          </p:nvPr>
+        </p:nvSpPr>
+        <p:spPr>
+          <a:xfrm>
+            <a:off x="6256866" y="480060"/>
+            <a:ext cx="5458122" cy="5897880"/>
+          </a:xfrm>
+          <a:prstGeom prst="rect">
+            <a:avLst/>
+          </a:prstGeom>
+          <a:solidFill>
+            <a:srgbClr val="FFFFFF"/>
+          </a:solidFill>
+          <a:ln>
+            <a:noFill/>
+          </a:ln>
+        </p:spPr>
+        <p:style>
+          <a:lnRef idx="2">
+            <a:schemeClr val="accent1">
+              <a:shade val="50000"/>
+            </a:schemeClr>
+          </a:lnRef>
+          <a:fillRef idx="1">
+            <a:schemeClr val="accent1"/>
+          </a:fillRef>
+          <a:effectRef idx="0">
+            <a:schemeClr val="accent1"/>
+          </a:effectRef>
+          <a:fontRef idx="minor">
+            <a:schemeClr val="lt1"/>
+          </a:fontRef>
+        </p:style>
+        <p:txBody>
+          <a:bodyPr rtlCol="0" anchor="ctr"/>
+          <a:lstStyle/>
+          <a:p>
+            <a:pPr algn="ctr"/>
+            <a:endParaRPr lang="en-US"/>
+          </a:p>
+        </p:txBody>
+      </p:sp>
+      <p:pic>
+        <p:nvPicPr>
+          <p:cNvPr id="6" name="Kép 5">
+            <a:extLst>
+              <a:ext uri="{FF2B5EF4-FFF2-40B4-BE49-F238E27FC236}">
+                <a16:creationId xmlns:a16="http://schemas.microsoft.com/office/drawing/2014/main" id="{CFF0CF27-3CC0-F00A-8BD4-B9731542947A}"/>
+              </a:ext>
+            </a:extLst>
+          </p:cNvPr>
+          <p:cNvPicPr>
+            <a:picLocks noChangeAspect="1"/>
+          </p:cNvPicPr>
+          <p:nvPr/>
+        </p:nvPicPr>
+        <p:blipFill>
+          <a:blip r:embed="rId2">
+            <a:extLst>
+              <a:ext uri="{28A0092B-C50C-407E-A947-70E740481C1C}">
+                <a14:useLocalDpi xmlns:a14="http://schemas.microsoft.com/office/drawing/2010/main" val="0"/>
+              </a:ext>
+            </a:extLst>
+          </a:blip>
+          <a:stretch>
+            <a:fillRect/>
+          </a:stretch>
+        </p:blipFill>
+        <p:spPr>
+          <a:xfrm>
+            <a:off x="7697618" y="643467"/>
+            <a:ext cx="2576618" cy="5571066"/>
+          </a:xfrm>
+          <a:prstGeom prst="rect">
+            <a:avLst/>
+          </a:prstGeom>
+        </p:spPr>
+      </p:pic>
+      <p:sp>
+        <p:nvSpPr>
+          <p:cNvPr id="65" name="Rectangle 64">
+            <a:extLst>
+              <a:ext uri="{FF2B5EF4-FFF2-40B4-BE49-F238E27FC236}">
+                <a16:creationId xmlns:a16="http://schemas.microsoft.com/office/drawing/2014/main" id="{9EFF17D4-9A8C-4CE5-B096-D8CCD4400437}"/>
+              </a:ext>
+              <a:ext uri="{C183D7F6-B498-43B3-948B-1728B52AA6E4}">
+                <adec:decorative xmlns:adec="http://schemas.microsoft.com/office/drawing/2017/decorative" val="1"/>
+              </a:ext>
+            </a:extLst>
+          </p:cNvPr>
+          <p:cNvSpPr>
+            <a:spLocks noGrp="1" noRot="1" noChangeAspect="1" noMove="1" noResize="1" noEditPoints="1" noAdjustHandles="1" noChangeArrowheads="1" noChangeShapeType="1" noTextEdit="1"/>
+          </p:cNvSpPr>
+          <p:nvPr>
+            <p:extLst>
+              <p:ext uri="{386F3935-93C4-4BCD-93E2-E3B085C9AB24}">
+                <p16:designElem xmlns:p16="http://schemas.microsoft.com/office/powerpoint/2015/main" val="1"/>
+              </p:ext>
+            </p:extLst>
+          </p:nvPr>
+        </p:nvSpPr>
+        <p:spPr>
+          <a:xfrm>
+            <a:off x="477012" y="480060"/>
+            <a:ext cx="5458121" cy="5897880"/>
+          </a:xfrm>
+          <a:prstGeom prst="rect">
+            <a:avLst/>
+          </a:prstGeom>
+          <a:solidFill>
+            <a:srgbClr val="FFFFFF"/>
+          </a:solidFill>
+          <a:ln>
+            <a:noFill/>
+          </a:ln>
+        </p:spPr>
+        <p:style>
+          <a:lnRef idx="2">
+            <a:schemeClr val="accent1">
+              <a:shade val="50000"/>
+            </a:schemeClr>
+          </a:lnRef>
+          <a:fillRef idx="1">
+            <a:schemeClr val="accent1"/>
+          </a:fillRef>
+          <a:effectRef idx="0">
+            <a:schemeClr val="accent1"/>
+          </a:effectRef>
+          <a:fontRef idx="minor">
+            <a:schemeClr val="lt1"/>
+          </a:fontRef>
+        </p:style>
+        <p:txBody>
+          <a:bodyPr rtlCol="0" anchor="ctr"/>
+          <a:lstStyle/>
+          <a:p>
+            <a:pPr algn="ctr"/>
+            <a:endParaRPr lang="en-US"/>
+          </a:p>
+        </p:txBody>
+      </p:sp>
+      <p:pic>
+        <p:nvPicPr>
+          <p:cNvPr id="4" name="Kép 3">
+            <a:extLst>
+              <a:ext uri="{FF2B5EF4-FFF2-40B4-BE49-F238E27FC236}">
+                <a16:creationId xmlns:a16="http://schemas.microsoft.com/office/drawing/2014/main" id="{16B03ECB-FE8D-8252-B40D-001BB0409399}"/>
+              </a:ext>
+            </a:extLst>
+          </p:cNvPr>
+          <p:cNvPicPr>
+            <a:picLocks noChangeAspect="1"/>
+          </p:cNvPicPr>
+          <p:nvPr/>
+        </p:nvPicPr>
+        <p:blipFill>
+          <a:blip r:embed="rId3">
+            <a:extLst>
+              <a:ext uri="{28A0092B-C50C-407E-A947-70E740481C1C}">
+                <a14:useLocalDpi xmlns:a14="http://schemas.microsoft.com/office/drawing/2010/main" val="0"/>
+              </a:ext>
+            </a:extLst>
+          </a:blip>
+          <a:stretch>
+            <a:fillRect/>
+          </a:stretch>
+        </p:blipFill>
+        <p:spPr>
+          <a:xfrm>
+            <a:off x="1917763" y="643467"/>
+            <a:ext cx="2576618" cy="5571066"/>
+          </a:xfrm>
+          <a:prstGeom prst="rect">
+            <a:avLst/>
+          </a:prstGeom>
+        </p:spPr>
+      </p:pic>
+    </p:spTree>
+    <p:extLst>
+      <p:ext uri="{BB962C8B-B14F-4D97-AF65-F5344CB8AC3E}">
+        <p14:creationId xmlns:p14="http://schemas.microsoft.com/office/powerpoint/2010/main" val="2448012127"/>
       </p:ext>
     </p:extLst>
   </p:cSld>
